--- a/docs/presentation.pptx
+++ b/docs/presentation.pptx
@@ -14,7 +14,6 @@
     <p:sldId id="261" r:id="rId8"/>
     <p:sldId id="262" r:id="rId9"/>
     <p:sldId id="263" r:id="rId10"/>
-    <p:sldId id="265" r:id="rId11"/>
   </p:sldIdLst>
   <p:sldSz cx="12192000" cy="6858000"/>
   <p:notesSz cx="6858000" cy="9144000"/>
@@ -336,7 +335,7 @@
           <a:p>
             <a:fld id="{CC057153-B650-4DEB-B370-79DDCFDCE934}" type="slidenum">
               <a:rPr lang="en-US" smtClean="0"/>
-              <a:t>‹N›</a:t>
+              <a:t>‹#›</a:t>
             </a:fld>
             <a:endParaRPr lang="en-US"/>
           </a:p>
@@ -544,7 +543,7 @@
           <a:p>
             <a:fld id="{CC057153-B650-4DEB-B370-79DDCFDCE934}" type="slidenum">
               <a:rPr lang="en-US" smtClean="0"/>
-              <a:t>‹N›</a:t>
+              <a:t>‹#›</a:t>
             </a:fld>
             <a:endParaRPr lang="en-US"/>
           </a:p>
@@ -752,7 +751,7 @@
           <a:p>
             <a:fld id="{CC057153-B650-4DEB-B370-79DDCFDCE934}" type="slidenum">
               <a:rPr lang="en-US" smtClean="0"/>
-              <a:t>‹N›</a:t>
+              <a:t>‹#›</a:t>
             </a:fld>
             <a:endParaRPr lang="en-US"/>
           </a:p>
@@ -950,7 +949,7 @@
           <a:p>
             <a:fld id="{CC057153-B650-4DEB-B370-79DDCFDCE934}" type="slidenum">
               <a:rPr lang="en-US" smtClean="0"/>
-              <a:t>‹N›</a:t>
+              <a:t>‹#›</a:t>
             </a:fld>
             <a:endParaRPr lang="en-US"/>
           </a:p>
@@ -1227,7 +1226,7 @@
           <a:p>
             <a:fld id="{CC057153-B650-4DEB-B370-79DDCFDCE934}" type="slidenum">
               <a:rPr lang="en-US" smtClean="0"/>
-              <a:t>‹N›</a:t>
+              <a:t>‹#›</a:t>
             </a:fld>
             <a:endParaRPr lang="en-US"/>
           </a:p>
@@ -1497,7 +1496,7 @@
           <a:p>
             <a:fld id="{CC057153-B650-4DEB-B370-79DDCFDCE934}" type="slidenum">
               <a:rPr lang="en-US" smtClean="0"/>
-              <a:t>‹N›</a:t>
+              <a:t>‹#›</a:t>
             </a:fld>
             <a:endParaRPr lang="en-US"/>
           </a:p>
@@ -1919,7 +1918,7 @@
           <a:p>
             <a:fld id="{CC057153-B650-4DEB-B370-79DDCFDCE934}" type="slidenum">
               <a:rPr lang="en-US" smtClean="0"/>
-              <a:t>‹N›</a:t>
+              <a:t>‹#›</a:t>
             </a:fld>
             <a:endParaRPr lang="en-US"/>
           </a:p>
@@ -2060,7 +2059,7 @@
           <a:p>
             <a:fld id="{CC057153-B650-4DEB-B370-79DDCFDCE934}" type="slidenum">
               <a:rPr lang="en-US" smtClean="0"/>
-              <a:t>‹N›</a:t>
+              <a:t>‹#›</a:t>
             </a:fld>
             <a:endParaRPr lang="en-US"/>
           </a:p>
@@ -2173,7 +2172,7 @@
           <a:p>
             <a:fld id="{CC057153-B650-4DEB-B370-79DDCFDCE934}" type="slidenum">
               <a:rPr lang="en-US" smtClean="0"/>
-              <a:t>‹N›</a:t>
+              <a:t>‹#›</a:t>
             </a:fld>
             <a:endParaRPr lang="en-US"/>
           </a:p>
@@ -2490,7 +2489,7 @@
           <a:p>
             <a:fld id="{CC057153-B650-4DEB-B370-79DDCFDCE934}" type="slidenum">
               <a:rPr lang="en-US" smtClean="0"/>
-              <a:t>‹N›</a:t>
+              <a:t>‹#›</a:t>
             </a:fld>
             <a:endParaRPr lang="en-US"/>
           </a:p>
@@ -2783,7 +2782,7 @@
           <a:p>
             <a:fld id="{CC057153-B650-4DEB-B370-79DDCFDCE934}" type="slidenum">
               <a:rPr lang="en-US" smtClean="0"/>
-              <a:t>‹N›</a:t>
+              <a:t>‹#›</a:t>
             </a:fld>
             <a:endParaRPr lang="en-US"/>
           </a:p>
@@ -3054,7 +3053,7 @@
           <a:p>
             <a:fld id="{CC057153-B650-4DEB-B370-79DDCFDCE934}" type="slidenum">
               <a:rPr lang="en-US" smtClean="0"/>
-              <a:t>‹N›</a:t>
+              <a:t>‹#›</a:t>
             </a:fld>
             <a:endParaRPr lang="en-US"/>
           </a:p>
@@ -3719,104 +3718,6 @@
 </p:sld>
 </file>
 
-<file path=ppt/slides/slide10.xml><?xml version="1.0" encoding="utf-8"?>
-<p:sld xmlns:a="http://schemas.openxmlformats.org/drawingml/2006/main" xmlns:r="http://schemas.openxmlformats.org/officeDocument/2006/relationships" xmlns:p="http://schemas.openxmlformats.org/presentationml/2006/main">
-  <p:cSld>
-    <p:spTree>
-      <p:nvGrpSpPr>
-        <p:cNvPr id="1" name=""/>
-        <p:cNvGrpSpPr/>
-        <p:nvPr/>
-      </p:nvGrpSpPr>
-      <p:grpSpPr>
-        <a:xfrm>
-          <a:off x="0" y="0"/>
-          <a:ext cx="0" cy="0"/>
-          <a:chOff x="0" y="0"/>
-          <a:chExt cx="0" cy="0"/>
-        </a:xfrm>
-      </p:grpSpPr>
-      <p:sp>
-        <p:nvSpPr>
-          <p:cNvPr id="2" name="Titolo 1">
-            <a:extLst>
-              <a:ext uri="{FF2B5EF4-FFF2-40B4-BE49-F238E27FC236}">
-                <a16:creationId xmlns:a16="http://schemas.microsoft.com/office/drawing/2014/main" id="{E87E63BE-5F01-2D72-5B0C-219DD8C71D91}"/>
-              </a:ext>
-            </a:extLst>
-          </p:cNvPr>
-          <p:cNvSpPr>
-            <a:spLocks noGrp="1"/>
-          </p:cNvSpPr>
-          <p:nvPr>
-            <p:ph type="title"/>
-          </p:nvPr>
-        </p:nvSpPr>
-        <p:spPr/>
-        <p:txBody>
-          <a:bodyPr/>
-          <a:lstStyle/>
-          <a:p>
-            <a:r>
-              <a:rPr lang="it-IT"/>
-              <a:t>Landmark </a:t>
-            </a:r>
-            <a:r>
-              <a:rPr lang="it-IT" err="1"/>
-              <a:t>Correlation</a:t>
-            </a:r>
-            <a:r>
-              <a:rPr lang="it-IT"/>
-              <a:t> </a:t>
-            </a:r>
-          </a:p>
-        </p:txBody>
-      </p:sp>
-      <p:pic>
-        <p:nvPicPr>
-          <p:cNvPr id="4" name="Segnaposto contenuto 3" descr="Immagine che contiene modello, testo, schermata, Rettangolo&#10;&#10;Il contenuto generato dall&amp;#39;IA potrebbe non essere corretto.">
-            <a:extLst>
-              <a:ext uri="{FF2B5EF4-FFF2-40B4-BE49-F238E27FC236}">
-                <a16:creationId xmlns:a16="http://schemas.microsoft.com/office/drawing/2014/main" id="{379765A1-9177-FAE7-5EE5-DE39B16009F3}"/>
-              </a:ext>
-            </a:extLst>
-          </p:cNvPr>
-          <p:cNvPicPr>
-            <a:picLocks noGrp="1" noChangeAspect="1"/>
-          </p:cNvPicPr>
-          <p:nvPr>
-            <p:ph idx="1"/>
-          </p:nvPr>
-        </p:nvPicPr>
-        <p:blipFill>
-          <a:blip r:embed="rId2"/>
-          <a:stretch>
-            <a:fillRect/>
-          </a:stretch>
-        </p:blipFill>
-        <p:spPr>
-          <a:xfrm>
-            <a:off x="3366149" y="1715532"/>
-            <a:ext cx="5146574" cy="4593828"/>
-          </a:xfrm>
-          <a:prstGeom prst="rect">
-            <a:avLst/>
-          </a:prstGeom>
-        </p:spPr>
-      </p:pic>
-    </p:spTree>
-    <p:extLst>
-      <p:ext uri="{BB962C8B-B14F-4D97-AF65-F5344CB8AC3E}">
-        <p14:creationId xmlns:p14="http://schemas.microsoft.com/office/powerpoint/2010/main" val="1251603841"/>
-      </p:ext>
-    </p:extLst>
-  </p:cSld>
-  <p:clrMapOvr>
-    <a:masterClrMapping/>
-  </p:clrMapOvr>
-</p:sld>
-</file>
-
 <file path=ppt/slides/slide2.xml><?xml version="1.0" encoding="utf-8"?>
 <p:sld xmlns:a="http://schemas.openxmlformats.org/drawingml/2006/main" xmlns:r="http://schemas.openxmlformats.org/officeDocument/2006/relationships" xmlns:p="http://schemas.openxmlformats.org/presentationml/2006/main">
   <p:cSld>

--- a/docs/presentation.pptx
+++ b/docs/presentation.pptx
@@ -14,7 +14,6 @@
     <p:sldId id="261" r:id="rId8"/>
     <p:sldId id="262" r:id="rId9"/>
     <p:sldId id="263" r:id="rId10"/>
-    <p:sldId id="265" r:id="rId11"/>
   </p:sldIdLst>
   <p:sldSz cx="12192000" cy="6858000"/>
   <p:notesSz cx="6858000" cy="9144000"/>
@@ -282,7 +281,7 @@
           <a:p>
             <a:fld id="{C128FA71-3A18-48C0-980F-4B68F7F63042}" type="datetime1">
               <a:rPr lang="en-US" smtClean="0"/>
-              <a:t>7/14/2025</a:t>
+              <a:t>7/16/2025</a:t>
             </a:fld>
             <a:endParaRPr lang="en-US"/>
           </a:p>
@@ -336,7 +335,7 @@
           <a:p>
             <a:fld id="{CC057153-B650-4DEB-B370-79DDCFDCE934}" type="slidenum">
               <a:rPr lang="en-US" smtClean="0"/>
-              <a:t>‹N›</a:t>
+              <a:t>‹#›</a:t>
             </a:fld>
             <a:endParaRPr lang="en-US"/>
           </a:p>
@@ -490,7 +489,7 @@
           <a:p>
             <a:fld id="{7104EDB3-C0E8-45F8-9E1D-1B6C8D1880C0}" type="datetime1">
               <a:rPr lang="en-US" smtClean="0"/>
-              <a:t>7/14/2025</a:t>
+              <a:t>7/16/2025</a:t>
             </a:fld>
             <a:endParaRPr lang="en-US"/>
           </a:p>
@@ -544,7 +543,7 @@
           <a:p>
             <a:fld id="{CC057153-B650-4DEB-B370-79DDCFDCE934}" type="slidenum">
               <a:rPr lang="en-US" smtClean="0"/>
-              <a:t>‹N›</a:t>
+              <a:t>‹#›</a:t>
             </a:fld>
             <a:endParaRPr lang="en-US"/>
           </a:p>
@@ -698,7 +697,7 @@
           <a:p>
             <a:fld id="{9CF0EC4B-54ED-4041-B552-9BA760FA3DBA}" type="datetime1">
               <a:rPr lang="en-US" smtClean="0"/>
-              <a:t>7/14/2025</a:t>
+              <a:t>7/16/2025</a:t>
             </a:fld>
             <a:endParaRPr lang="en-US"/>
           </a:p>
@@ -752,7 +751,7 @@
           <a:p>
             <a:fld id="{CC057153-B650-4DEB-B370-79DDCFDCE934}" type="slidenum">
               <a:rPr lang="en-US" smtClean="0"/>
-              <a:t>‹N›</a:t>
+              <a:t>‹#›</a:t>
             </a:fld>
             <a:endParaRPr lang="en-US"/>
           </a:p>
@@ -896,7 +895,7 @@
           <a:p>
             <a:fld id="{51C1210E-201E-4473-82AC-2466F5386C38}" type="datetime1">
               <a:rPr lang="en-US" smtClean="0"/>
-              <a:t>7/14/2025</a:t>
+              <a:t>7/16/2025</a:t>
             </a:fld>
             <a:endParaRPr lang="en-US"/>
           </a:p>
@@ -950,7 +949,7 @@
           <a:p>
             <a:fld id="{CC057153-B650-4DEB-B370-79DDCFDCE934}" type="slidenum">
               <a:rPr lang="en-US" smtClean="0"/>
-              <a:t>‹N›</a:t>
+              <a:t>‹#›</a:t>
             </a:fld>
             <a:endParaRPr lang="en-US"/>
           </a:p>
@@ -1173,7 +1172,7 @@
           <a:p>
             <a:fld id="{B01EA198-6CAB-4B8F-B93F-1F9C8C4B6CE7}" type="datetime1">
               <a:rPr lang="en-US" smtClean="0"/>
-              <a:t>7/14/2025</a:t>
+              <a:t>7/16/2025</a:t>
             </a:fld>
             <a:endParaRPr lang="en-US"/>
           </a:p>
@@ -1227,7 +1226,7 @@
           <a:p>
             <a:fld id="{CC057153-B650-4DEB-B370-79DDCFDCE934}" type="slidenum">
               <a:rPr lang="en-US" smtClean="0"/>
-              <a:t>‹N›</a:t>
+              <a:t>‹#›</a:t>
             </a:fld>
             <a:endParaRPr lang="en-US"/>
           </a:p>
@@ -1443,7 +1442,7 @@
           <a:p>
             <a:fld id="{CA06041F-4525-44D5-AA4F-332294BF1F56}" type="datetime1">
               <a:rPr lang="en-US" smtClean="0"/>
-              <a:t>7/14/2025</a:t>
+              <a:t>7/16/2025</a:t>
             </a:fld>
             <a:endParaRPr lang="en-US"/>
           </a:p>
@@ -1497,7 +1496,7 @@
           <a:p>
             <a:fld id="{CC057153-B650-4DEB-B370-79DDCFDCE934}" type="slidenum">
               <a:rPr lang="en-US" smtClean="0"/>
-              <a:t>‹N›</a:t>
+              <a:t>‹#›</a:t>
             </a:fld>
             <a:endParaRPr lang="en-US"/>
           </a:p>
@@ -1865,7 +1864,7 @@
           <a:p>
             <a:fld id="{F9557091-BBDF-4EB9-BA6B-2BB67AC4FC0F}" type="datetime1">
               <a:rPr lang="en-US" smtClean="0"/>
-              <a:t>7/14/2025</a:t>
+              <a:t>7/16/2025</a:t>
             </a:fld>
             <a:endParaRPr lang="en-US"/>
           </a:p>
@@ -1919,7 +1918,7 @@
           <a:p>
             <a:fld id="{CC057153-B650-4DEB-B370-79DDCFDCE934}" type="slidenum">
               <a:rPr lang="en-US" smtClean="0"/>
-              <a:t>‹N›</a:t>
+              <a:t>‹#›</a:t>
             </a:fld>
             <a:endParaRPr lang="en-US"/>
           </a:p>
@@ -2006,7 +2005,7 @@
           <a:p>
             <a:fld id="{2D6B226B-77A6-410C-9796-083F278E0125}" type="datetime1">
               <a:rPr lang="en-US" smtClean="0"/>
-              <a:t>7/14/2025</a:t>
+              <a:t>7/16/2025</a:t>
             </a:fld>
             <a:endParaRPr lang="en-US"/>
           </a:p>
@@ -2060,7 +2059,7 @@
           <a:p>
             <a:fld id="{CC057153-B650-4DEB-B370-79DDCFDCE934}" type="slidenum">
               <a:rPr lang="en-US" smtClean="0"/>
-              <a:t>‹N›</a:t>
+              <a:t>‹#›</a:t>
             </a:fld>
             <a:endParaRPr lang="en-US"/>
           </a:p>
@@ -2119,7 +2118,7 @@
           <a:p>
             <a:fld id="{A23A578B-D289-4C40-8593-3D356C49DA58}" type="datetime1">
               <a:rPr lang="en-US" smtClean="0"/>
-              <a:t>7/14/2025</a:t>
+              <a:t>7/16/2025</a:t>
             </a:fld>
             <a:endParaRPr lang="en-US"/>
           </a:p>
@@ -2173,7 +2172,7 @@
           <a:p>
             <a:fld id="{CC057153-B650-4DEB-B370-79DDCFDCE934}" type="slidenum">
               <a:rPr lang="en-US" smtClean="0"/>
-              <a:t>‹N›</a:t>
+              <a:t>‹#›</a:t>
             </a:fld>
             <a:endParaRPr lang="en-US"/>
           </a:p>
@@ -2436,7 +2435,7 @@
           <a:p>
             <a:fld id="{713DFAE3-14DB-48A7-A80F-80DDB072CE3D}" type="datetime1">
               <a:rPr lang="en-US" smtClean="0"/>
-              <a:t>7/14/2025</a:t>
+              <a:t>7/16/2025</a:t>
             </a:fld>
             <a:endParaRPr lang="en-US"/>
           </a:p>
@@ -2490,7 +2489,7 @@
           <a:p>
             <a:fld id="{CC057153-B650-4DEB-B370-79DDCFDCE934}" type="slidenum">
               <a:rPr lang="en-US" smtClean="0"/>
-              <a:t>‹N›</a:t>
+              <a:t>‹#›</a:t>
             </a:fld>
             <a:endParaRPr lang="en-US"/>
           </a:p>
@@ -2729,7 +2728,7 @@
           <a:p>
             <a:fld id="{92C5EAEF-6478-4102-8F5D-A5FE9FC97ACB}" type="datetime1">
               <a:rPr lang="en-US" smtClean="0"/>
-              <a:t>7/14/2025</a:t>
+              <a:t>7/16/2025</a:t>
             </a:fld>
             <a:endParaRPr lang="en-US"/>
           </a:p>
@@ -2783,7 +2782,7 @@
           <a:p>
             <a:fld id="{CC057153-B650-4DEB-B370-79DDCFDCE934}" type="slidenum">
               <a:rPr lang="en-US" smtClean="0"/>
-              <a:t>‹N›</a:t>
+              <a:t>‹#›</a:t>
             </a:fld>
             <a:endParaRPr lang="en-US"/>
           </a:p>
@@ -2968,7 +2967,7 @@
           <a:p>
             <a:fld id="{67F45AC6-C491-4585-A584-9CE2AF7D5500}" type="datetime1">
               <a:rPr lang="en-US" smtClean="0"/>
-              <a:t>7/14/2025</a:t>
+              <a:t>7/16/2025</a:t>
             </a:fld>
             <a:endParaRPr lang="en-US"/>
           </a:p>
@@ -3054,7 +3053,7 @@
           <a:p>
             <a:fld id="{CC057153-B650-4DEB-B370-79DDCFDCE934}" type="slidenum">
               <a:rPr lang="en-US" smtClean="0"/>
-              <a:t>‹N›</a:t>
+              <a:t>‹#›</a:t>
             </a:fld>
             <a:endParaRPr lang="en-US"/>
           </a:p>
@@ -3719,104 +3718,6 @@
 </p:sld>
 </file>
 
-<file path=ppt/slides/slide10.xml><?xml version="1.0" encoding="utf-8"?>
-<p:sld xmlns:a="http://schemas.openxmlformats.org/drawingml/2006/main" xmlns:r="http://schemas.openxmlformats.org/officeDocument/2006/relationships" xmlns:p="http://schemas.openxmlformats.org/presentationml/2006/main">
-  <p:cSld>
-    <p:spTree>
-      <p:nvGrpSpPr>
-        <p:cNvPr id="1" name=""/>
-        <p:cNvGrpSpPr/>
-        <p:nvPr/>
-      </p:nvGrpSpPr>
-      <p:grpSpPr>
-        <a:xfrm>
-          <a:off x="0" y="0"/>
-          <a:ext cx="0" cy="0"/>
-          <a:chOff x="0" y="0"/>
-          <a:chExt cx="0" cy="0"/>
-        </a:xfrm>
-      </p:grpSpPr>
-      <p:sp>
-        <p:nvSpPr>
-          <p:cNvPr id="2" name="Titolo 1">
-            <a:extLst>
-              <a:ext uri="{FF2B5EF4-FFF2-40B4-BE49-F238E27FC236}">
-                <a16:creationId xmlns:a16="http://schemas.microsoft.com/office/drawing/2014/main" id="{E87E63BE-5F01-2D72-5B0C-219DD8C71D91}"/>
-              </a:ext>
-            </a:extLst>
-          </p:cNvPr>
-          <p:cNvSpPr>
-            <a:spLocks noGrp="1"/>
-          </p:cNvSpPr>
-          <p:nvPr>
-            <p:ph type="title"/>
-          </p:nvPr>
-        </p:nvSpPr>
-        <p:spPr/>
-        <p:txBody>
-          <a:bodyPr/>
-          <a:lstStyle/>
-          <a:p>
-            <a:r>
-              <a:rPr lang="it-IT"/>
-              <a:t>Landmark </a:t>
-            </a:r>
-            <a:r>
-              <a:rPr lang="it-IT" err="1"/>
-              <a:t>Correlation</a:t>
-            </a:r>
-            <a:r>
-              <a:rPr lang="it-IT"/>
-              <a:t> </a:t>
-            </a:r>
-          </a:p>
-        </p:txBody>
-      </p:sp>
-      <p:pic>
-        <p:nvPicPr>
-          <p:cNvPr id="4" name="Segnaposto contenuto 3" descr="Immagine che contiene modello, testo, schermata, Rettangolo&#10;&#10;Il contenuto generato dall&amp;#39;IA potrebbe non essere corretto.">
-            <a:extLst>
-              <a:ext uri="{FF2B5EF4-FFF2-40B4-BE49-F238E27FC236}">
-                <a16:creationId xmlns:a16="http://schemas.microsoft.com/office/drawing/2014/main" id="{379765A1-9177-FAE7-5EE5-DE39B16009F3}"/>
-              </a:ext>
-            </a:extLst>
-          </p:cNvPr>
-          <p:cNvPicPr>
-            <a:picLocks noGrp="1" noChangeAspect="1"/>
-          </p:cNvPicPr>
-          <p:nvPr>
-            <p:ph idx="1"/>
-          </p:nvPr>
-        </p:nvPicPr>
-        <p:blipFill>
-          <a:blip r:embed="rId2"/>
-          <a:stretch>
-            <a:fillRect/>
-          </a:stretch>
-        </p:blipFill>
-        <p:spPr>
-          <a:xfrm>
-            <a:off x="3366149" y="1715532"/>
-            <a:ext cx="5146574" cy="4593828"/>
-          </a:xfrm>
-          <a:prstGeom prst="rect">
-            <a:avLst/>
-          </a:prstGeom>
-        </p:spPr>
-      </p:pic>
-    </p:spTree>
-    <p:extLst>
-      <p:ext uri="{BB962C8B-B14F-4D97-AF65-F5344CB8AC3E}">
-        <p14:creationId xmlns:p14="http://schemas.microsoft.com/office/powerpoint/2010/main" val="1251603841"/>
-      </p:ext>
-    </p:extLst>
-  </p:cSld>
-  <p:clrMapOvr>
-    <a:masterClrMapping/>
-  </p:clrMapOvr>
-</p:sld>
-</file>
-
 <file path=ppt/slides/slide2.xml><?xml version="1.0" encoding="utf-8"?>
 <p:sld xmlns:a="http://schemas.openxmlformats.org/drawingml/2006/main" xmlns:r="http://schemas.openxmlformats.org/officeDocument/2006/relationships" xmlns:p="http://schemas.openxmlformats.org/presentationml/2006/main">
   <p:cSld>
